--- a/outputs/ophthalmology-batch-20261011/endothelium/A6_color_editable.pptx
+++ b/outputs/ophthalmology-batch-20261011/endothelium/A6_color_editable.pptx
@@ -647,7 +647,7 @@
           <a:p/>
           <a:p>
             <a:r>
-              <a:t>endothelium-12 气体固定：过滤空气或10%~14% C3F8固定；气少/吸收快增脱离，过多致瞳孔阻滞。复杂DSEK可黏弹剂，DMEK不能黏弹剂固定。</a:t>
+              <a:t>endothelium-12 气体固定：过滤空气或10%~14% C₃F₈固定；气少/吸收快增脱离，过多致瞳孔阻滞。复杂DSEK可黏弹剂，DMEK不能使用黏弹剂固定植片。</a:t>
             </a:r>
           </a:p>
           <a:p>
@@ -759,7 +759,7 @@
           <a:p/>
           <a:p>
             <a:r>
-              <a:t>endothelium-16 阻滞性青光眼：推荐6:00周边虹膜切除防阻滞；术后早期2~6 h密切看眼压，必要时释过量前房气体，避免不可逆损伤。具体眼压数值切点未明确。</a:t>
+              <a:t>endothelium-16 阻滞性青光眼：推荐6点钟方位周边虹膜切除防阻滞；术后早期2~6 h密切看眼压，必要时释过量前房气体，避免不可逆损伤。具体眼压数值切点未明确。</a:t>
             </a:r>
           </a:p>
           <a:p>
@@ -791,7 +791,7 @@
           <a:p/>
           <a:p>
             <a:r>
-              <a:t>endothelium-18 术后检查：第1天气体填大部前房但坐位避开6:00虹膜切除口；可疑脱离及时前节OCT；透明后尽早内皮计数并定期复查。</a:t>
+              <a:t>endothelium-18 术后检查：第1天气体填大部前房但坐位避开6点钟方位虹膜切除口；可疑脱离及时前节OCT；透明后尽早内皮计数并定期复查。</a:t>
             </a:r>
           </a:p>
           <a:p>
@@ -4708,7 +4708,7 @@
       </p:sp>
       <p:sp>
         <p:nvSpPr>
-          <p:cNvPr id="19" name="辨方向、减少接触；空气或10%~14% C3F8固定；周边虹膜切除防阻滞。DMEK不能黏弹剂固定。"/>
+          <p:cNvPr id="19" name="辨方向、减少接触；空气或10%~14% C₃F₈固定；周边虹膜切除防阻滞。DMEK不能使用黏弹剂固定"/>
           <p:cNvSpPr txBox="1"/>
           <p:nvPr/>
         </p:nvSpPr>
@@ -4748,21 +4748,19 @@
                 <a:ea typeface="Microsoft YaHei"/>
                 <a:cs typeface="Microsoft YaHei"/>
               </a:rPr>
-              <a:t>辨方向、减少接触；空气或10%~14% C3F8固定；周边虹膜</a:t>
-            </a:r>
-          </a:p>
-          <a:p>
-            <a:pPr>
-              <a:lnSpc>
-                <a:spcPts val="1160"/>
-              </a:lnSpc>
-              <a:spcBef>
-                <a:spcPts val="0"/>
-              </a:spcBef>
-              <a:spcAft>
-                <a:spcPts val="0"/>
-              </a:spcAft>
-            </a:pPr>
+              <a:t>辨方向、减少接触；空气或10%~14% C</a:t>
+            </a:r>
+            <a:r>
+              <a:rPr sz="950" b="0" lang="zh-CN">
+                <a:solidFill>
+                  <a:srgbClr val="1E2E3B"/>
+                </a:solidFill>
+                <a:latin typeface="Arial"/>
+                <a:ea typeface="Arial"/>
+                <a:cs typeface="Arial"/>
+              </a:rPr>
+              <a:t>₃</a:t>
+            </a:r>
             <a:r>
               <a:rPr sz="950" b="0" lang="zh-CN">
                 <a:solidFill>
@@ -4772,7 +4770,53 @@
                 <a:ea typeface="Microsoft YaHei"/>
                 <a:cs typeface="Microsoft YaHei"/>
               </a:rPr>
-              <a:t>切除防阻滞。DMEK不能黏弹剂固定。</a:t>
+              <a:t>F</a:t>
+            </a:r>
+            <a:r>
+              <a:rPr sz="950" b="0" lang="zh-CN">
+                <a:solidFill>
+                  <a:srgbClr val="1E2E3B"/>
+                </a:solidFill>
+                <a:latin typeface="Arial"/>
+                <a:ea typeface="Arial"/>
+                <a:cs typeface="Arial"/>
+              </a:rPr>
+              <a:t>₈</a:t>
+            </a:r>
+            <a:r>
+              <a:rPr sz="950" b="0" lang="zh-CN">
+                <a:solidFill>
+                  <a:srgbClr val="1E2E3B"/>
+                </a:solidFill>
+                <a:latin typeface="Microsoft YaHei"/>
+                <a:ea typeface="Microsoft YaHei"/>
+                <a:cs typeface="Microsoft YaHei"/>
+              </a:rPr>
+              <a:t>固定；周边虹膜切</a:t>
+            </a:r>
+          </a:p>
+          <a:p>
+            <a:pPr>
+              <a:lnSpc>
+                <a:spcPts val="1160"/>
+              </a:lnSpc>
+              <a:spcBef>
+                <a:spcPts val="0"/>
+              </a:spcBef>
+              <a:spcAft>
+                <a:spcPts val="0"/>
+              </a:spcAft>
+            </a:pPr>
+            <a:r>
+              <a:rPr sz="950" b="0" lang="zh-CN">
+                <a:solidFill>
+                  <a:srgbClr val="1E2E3B"/>
+                </a:solidFill>
+                <a:latin typeface="Microsoft YaHei"/>
+                <a:ea typeface="Microsoft YaHei"/>
+                <a:cs typeface="Microsoft YaHei"/>
+              </a:rPr>
+              <a:t>除防阻滞。DMEK不能使用黏弹剂固定。</a:t>
             </a:r>
           </a:p>
         </p:txBody>
@@ -5152,7 +5196,7 @@
       </p:sp>
       <p:sp>
         <p:nvSpPr>
-          <p:cNvPr id="7" name="DSEK&gt;1/3或DMEK&gt;1/4面积再注气；&lt;1/4可观察，扩大/水肿不退再注。DSEK中间区间及"/>
+          <p:cNvPr id="7" name="DSEK脱离&gt;1/3或DMEK脱离&gt;1/4面积再注气；&lt;1/4可观察，扩大/水肿不退再注。DSEK中"/>
           <p:cNvSpPr txBox="1"/>
           <p:nvPr/>
         </p:nvSpPr>
@@ -5192,7 +5236,7 @@
                 <a:ea typeface="Microsoft YaHei"/>
                 <a:cs typeface="Microsoft YaHei"/>
               </a:rPr>
-              <a:t>DSEK&gt;1/3或DMEK&gt;1/4面积再注气；&lt;1/4可观察，扩大/水</a:t>
+              <a:t>DSEK脱离&gt;1/3或DMEK脱离&gt;1/4面积再注气；&lt;1/4可观察，</a:t>
             </a:r>
           </a:p>
           <a:p>
@@ -5216,7 +5260,7 @@
                 <a:ea typeface="Microsoft YaHei"/>
                 <a:cs typeface="Microsoft YaHei"/>
               </a:rPr>
-              <a:t>肿不退再注。DSEK中间区间及边界原文未明确。</a:t>
+              <a:t>扩大/水肿不退再注。DSEK中间区间及边界原文未明确。</a:t>
             </a:r>
           </a:p>
         </p:txBody>
@@ -5572,7 +5616,7 @@
       </p:sp>
       <p:sp>
         <p:nvSpPr>
-          <p:cNvPr id="15" name="保持24 h足量气体，坐位避开6:00虹膜切除口；可疑脱离做前节OCT；透明后尽早内皮计数、定期复查"/>
+          <p:cNvPr id="15" name="保持24 h足量气体，坐位避开6点钟方位虹膜切除口；可疑脱离做前节OCT；透明后尽早内皮计数、定期复"/>
           <p:cNvSpPr txBox="1"/>
           <p:nvPr/>
         </p:nvSpPr>
@@ -5612,7 +5656,7 @@
                 <a:ea typeface="Microsoft YaHei"/>
                 <a:cs typeface="Microsoft YaHei"/>
               </a:rPr>
-              <a:t>保持24 h足量气体，坐位避开6:00虹膜切除口；可疑脱离做</a:t>
+              <a:t>保持24 h足量气体，坐位避开6点钟方位虹膜切除口；可疑脱</a:t>
             </a:r>
           </a:p>
           <a:p>
@@ -5636,7 +5680,7 @@
                 <a:ea typeface="Microsoft YaHei"/>
                 <a:cs typeface="Microsoft YaHei"/>
               </a:rPr>
-              <a:t>前节OCT；透明后尽早内皮计数、定期复查。</a:t>
+              <a:t>离做前节OCT；透明后尽早内皮计数、定期复查。</a:t>
             </a:r>
           </a:p>
         </p:txBody>
